--- a/SQL 1年生 PowerPoint.pptx
+++ b/SQL 1年生 PowerPoint.pptx
@@ -10949,7 +10949,7 @@
               </a:spcAft>
             </a:pPr>
             <a:r>
-              <a:rPr sz="1280" b="0">
+              <a:rPr sz="1280" b="0" dirty="0">
                 <a:solidFill>
                   <a:srgbClr val="3A3550"/>
                 </a:solidFill>
@@ -10957,7 +10957,102 @@
                 <a:ea typeface="Meiryo"/>
                 <a:cs typeface="Meiryo"/>
               </a:rPr>
-              <a:t>PRIMARY KEY＝主キー（重複・NULL禁止）NOT NULL＝必ず値を入れる（入れ忘れ防止）</a:t>
+              <a:t>PRIMARY </a:t>
+            </a:r>
+            <a:r>
+              <a:rPr sz="1280" b="0" dirty="0" err="1">
+                <a:solidFill>
+                  <a:srgbClr val="3A3550"/>
+                </a:solidFill>
+                <a:latin typeface="Meiryo"/>
+                <a:ea typeface="Meiryo"/>
+                <a:cs typeface="Meiryo"/>
+              </a:rPr>
+              <a:t>KEY＝主キ</a:t>
+            </a:r>
+            <a:r>
+              <a:rPr sz="1280" b="0" dirty="0">
+                <a:solidFill>
+                  <a:srgbClr val="3A3550"/>
+                </a:solidFill>
+                <a:latin typeface="Meiryo"/>
+                <a:ea typeface="Meiryo"/>
+                <a:cs typeface="Meiryo"/>
+              </a:rPr>
+              <a:t>ー（</a:t>
+            </a:r>
+            <a:r>
+              <a:rPr sz="1280" b="0" dirty="0" err="1">
+                <a:solidFill>
+                  <a:srgbClr val="3A3550"/>
+                </a:solidFill>
+                <a:latin typeface="Meiryo"/>
+                <a:ea typeface="Meiryo"/>
+                <a:cs typeface="Meiryo"/>
+              </a:rPr>
+              <a:t>重複・NULL禁止</a:t>
+            </a:r>
+            <a:r>
+              <a:rPr sz="1280" b="0" dirty="0">
+                <a:solidFill>
+                  <a:srgbClr val="3A3550"/>
+                </a:solidFill>
+                <a:latin typeface="Meiryo"/>
+                <a:ea typeface="Meiryo"/>
+                <a:cs typeface="Meiryo"/>
+              </a:rPr>
+              <a:t>）</a:t>
+            </a:r>
+            <a:endParaRPr lang="en-US" sz="1280" b="0" dirty="0">
+              <a:solidFill>
+                <a:srgbClr val="3A3550"/>
+              </a:solidFill>
+              <a:latin typeface="Meiryo"/>
+              <a:ea typeface="Meiryo"/>
+              <a:cs typeface="Meiryo"/>
+            </a:endParaRPr>
+          </a:p>
+          <a:p>
+            <a:pPr algn="l">
+              <a:lnSpc>
+                <a:spcPct val="114000"/>
+              </a:lnSpc>
+              <a:spcAft>
+                <a:spcPts val="300"/>
+              </a:spcAft>
+            </a:pPr>
+            <a:r>
+              <a:rPr sz="1280" b="0" dirty="0">
+                <a:solidFill>
+                  <a:srgbClr val="3A3550"/>
+                </a:solidFill>
+                <a:latin typeface="Meiryo"/>
+                <a:ea typeface="Meiryo"/>
+                <a:cs typeface="Meiryo"/>
+              </a:rPr>
+              <a:t>NOT </a:t>
+            </a:r>
+            <a:r>
+              <a:rPr sz="1280" b="0" dirty="0" err="1">
+                <a:solidFill>
+                  <a:srgbClr val="3A3550"/>
+                </a:solidFill>
+                <a:latin typeface="Meiryo"/>
+                <a:ea typeface="Meiryo"/>
+                <a:cs typeface="Meiryo"/>
+              </a:rPr>
+              <a:t>NULL＝必ず値を入れる（入れ忘れ防止</a:t>
+            </a:r>
+            <a:r>
+              <a:rPr sz="1280" b="0" dirty="0">
+                <a:solidFill>
+                  <a:srgbClr val="3A3550"/>
+                </a:solidFill>
+                <a:latin typeface="Meiryo"/>
+                <a:ea typeface="Meiryo"/>
+                <a:cs typeface="Meiryo"/>
+              </a:rPr>
+              <a:t>）</a:t>
             </a:r>
           </a:p>
         </p:txBody>

--- a/SQL 1年生 PowerPoint.pptx
+++ b/SQL 1年生 PowerPoint.pptx
@@ -1081,7 +1081,32 @@
           <a:lstStyle/>
           <a:p>
             <a:r>
-              <a:t>分けた表は、結合して使います。INNER JOINで、両方の表にある共通の列＝ここではitem_idを鍵にして、2つのテーブルを1つに合体させます。右がその結果で、売上に商品名や産地が組み合わさっています。結合した表では、個数かける単価のような計算もでき、SUMと組み合わせれば合計金額も出せます。最後に .mode csv と .once を使えば、結果をCSVファイルに書き出してExcelで開くこともできます。</a:t>
+              <a:rPr dirty="0" err="1"/>
+              <a:t>分けた表は、結合して使います。INNER</a:t>
+            </a:r>
+            <a:r>
+              <a:rPr dirty="0"/>
+              <a:t> JOINで、両方の表にある共通の列＝ここではitem_idを鍵にして、2つのテーブルを1つに合体させます。右がその結果で、売上に商品名や</a:t>
+            </a:r>
+            <a:r>
+              <a:rPr lang="ja-JP" altLang="en-US" dirty="0"/>
+              <a:t>購入した数</a:t>
+            </a:r>
+            <a:r>
+              <a:rPr dirty="0" err="1"/>
+              <a:t>が組み合わさっています。結合した表では、個数かける単価のような計算もでき、SUMと組み合わせれば合計金額も出せます。最後に</a:t>
+            </a:r>
+            <a:r>
+              <a:rPr dirty="0"/>
+              <a:t> .mode csv と .once </a:t>
+            </a:r>
+            <a:r>
+              <a:rPr dirty="0" err="1"/>
+              <a:t>を使えば、結果をCSVファイルに書き出してExcelで開くこともできます</a:t>
+            </a:r>
+            <a:r>
+              <a:rPr dirty="0"/>
+              <a:t>。</a:t>
             </a:r>
           </a:p>
         </p:txBody>
@@ -1438,7 +1463,7 @@
           <a:p>
             <a:r>
               <a:rPr dirty="0"/>
-              <a:t>データベースとは、データの集まりと、それを管理するしくみ＝DBMSをまとめた呼び方です。中でも、データを表の形で管理するリレーショナル型＝RDBMSが今の主流で、OracleやMySQL、そして今回使うSQLiteなどがあります。そしてSQLは、このRDBMSにお願いする命令文で、基本は各データベース共通なので一度覚えれば応用が効きます。表の呼び名は下の図のとおり</a:t>
+              <a:t>データベースとは、データの集まりと、それを管理するしくみ＝DBMSをまとめた呼び方です。中でも、データを表の形で管理するリレーショナル型＝RDBMSが今の主流で、OracleやMySQL、そして今回使うSQLiteなどがあります。SQLは、このRDBMSにお願いする命令文で、基本は各データベース共通なので一度覚えれば応用が効きます。表の呼び名は下の図のとおり</a:t>
             </a:r>
             <a:r>
               <a:rPr lang="ja-JP" altLang="en-US" dirty="0"/>
@@ -2100,7 +2125,7 @@
           <a:p>
             <a:fld id="{5BCAD085-E8A6-8845-BD4E-CB4CCA059FC4}" type="datetimeFigureOut">
               <a:rPr lang="en-US" smtClean="0"/>
-              <a:t>8/5/2026</a:t>
+              <a:t>8/17/2026</a:t>
             </a:fld>
             <a:endParaRPr lang="en-US"/>
           </a:p>
@@ -2268,7 +2293,7 @@
           <a:p>
             <a:fld id="{5BCAD085-E8A6-8845-BD4E-CB4CCA059FC4}" type="datetimeFigureOut">
               <a:rPr lang="en-US" smtClean="0"/>
-              <a:t>8/5/2026</a:t>
+              <a:t>8/17/2026</a:t>
             </a:fld>
             <a:endParaRPr lang="en-US"/>
           </a:p>
@@ -2446,7 +2471,7 @@
           <a:p>
             <a:fld id="{5BCAD085-E8A6-8845-BD4E-CB4CCA059FC4}" type="datetimeFigureOut">
               <a:rPr lang="en-US" smtClean="0"/>
-              <a:t>8/5/2026</a:t>
+              <a:t>8/17/2026</a:t>
             </a:fld>
             <a:endParaRPr lang="en-US"/>
           </a:p>
@@ -2614,7 +2639,7 @@
           <a:p>
             <a:fld id="{5BCAD085-E8A6-8845-BD4E-CB4CCA059FC4}" type="datetimeFigureOut">
               <a:rPr lang="en-US" smtClean="0"/>
-              <a:t>8/5/2026</a:t>
+              <a:t>8/17/2026</a:t>
             </a:fld>
             <a:endParaRPr lang="en-US"/>
           </a:p>
@@ -2859,7 +2884,7 @@
           <a:p>
             <a:fld id="{5BCAD085-E8A6-8845-BD4E-CB4CCA059FC4}" type="datetimeFigureOut">
               <a:rPr lang="en-US" smtClean="0"/>
-              <a:t>8/5/2026</a:t>
+              <a:t>8/17/2026</a:t>
             </a:fld>
             <a:endParaRPr lang="en-US"/>
           </a:p>
@@ -3144,7 +3169,7 @@
           <a:p>
             <a:fld id="{5BCAD085-E8A6-8845-BD4E-CB4CCA059FC4}" type="datetimeFigureOut">
               <a:rPr lang="en-US" smtClean="0"/>
-              <a:t>8/5/2026</a:t>
+              <a:t>8/17/2026</a:t>
             </a:fld>
             <a:endParaRPr lang="en-US"/>
           </a:p>
@@ -3563,7 +3588,7 @@
           <a:p>
             <a:fld id="{5BCAD085-E8A6-8845-BD4E-CB4CCA059FC4}" type="datetimeFigureOut">
               <a:rPr lang="en-US" smtClean="0"/>
-              <a:t>8/5/2026</a:t>
+              <a:t>8/17/2026</a:t>
             </a:fld>
             <a:endParaRPr lang="en-US"/>
           </a:p>
@@ -3680,7 +3705,7 @@
           <a:p>
             <a:fld id="{5BCAD085-E8A6-8845-BD4E-CB4CCA059FC4}" type="datetimeFigureOut">
               <a:rPr lang="en-US" smtClean="0"/>
-              <a:t>8/5/2026</a:t>
+              <a:t>8/17/2026</a:t>
             </a:fld>
             <a:endParaRPr lang="en-US"/>
           </a:p>
@@ -3775,7 +3800,7 @@
           <a:p>
             <a:fld id="{5BCAD085-E8A6-8845-BD4E-CB4CCA059FC4}" type="datetimeFigureOut">
               <a:rPr lang="en-US" smtClean="0"/>
-              <a:t>8/5/2026</a:t>
+              <a:t>8/17/2026</a:t>
             </a:fld>
             <a:endParaRPr lang="en-US"/>
           </a:p>
@@ -4050,7 +4075,7 @@
           <a:p>
             <a:fld id="{5BCAD085-E8A6-8845-BD4E-CB4CCA059FC4}" type="datetimeFigureOut">
               <a:rPr lang="en-US" smtClean="0"/>
-              <a:t>8/5/2026</a:t>
+              <a:t>8/17/2026</a:t>
             </a:fld>
             <a:endParaRPr lang="en-US"/>
           </a:p>
@@ -4302,7 +4327,7 @@
           <a:p>
             <a:fld id="{5BCAD085-E8A6-8845-BD4E-CB4CCA059FC4}" type="datetimeFigureOut">
               <a:rPr lang="en-US" smtClean="0"/>
-              <a:t>8/5/2026</a:t>
+              <a:t>8/17/2026</a:t>
             </a:fld>
             <a:endParaRPr lang="en-US"/>
           </a:p>
@@ -4513,7 +4538,7 @@
           <a:p>
             <a:fld id="{5BCAD085-E8A6-8845-BD4E-CB4CCA059FC4}" type="datetimeFigureOut">
               <a:rPr lang="en-US" smtClean="0"/>
-              <a:t>8/5/2026</a:t>
+              <a:t>8/17/2026</a:t>
             </a:fld>
             <a:endParaRPr lang="en-US"/>
           </a:p>
@@ -10949,7 +10974,7 @@
               </a:spcAft>
             </a:pPr>
             <a:r>
-              <a:rPr sz="1280" b="0" dirty="0">
+              <a:rPr sz="1280" b="0">
                 <a:solidFill>
                   <a:srgbClr val="3A3550"/>
                 </a:solidFill>
@@ -10957,102 +10982,7 @@
                 <a:ea typeface="Meiryo"/>
                 <a:cs typeface="Meiryo"/>
               </a:rPr>
-              <a:t>PRIMARY </a:t>
-            </a:r>
-            <a:r>
-              <a:rPr sz="1280" b="0" dirty="0" err="1">
-                <a:solidFill>
-                  <a:srgbClr val="3A3550"/>
-                </a:solidFill>
-                <a:latin typeface="Meiryo"/>
-                <a:ea typeface="Meiryo"/>
-                <a:cs typeface="Meiryo"/>
-              </a:rPr>
-              <a:t>KEY＝主キ</a:t>
-            </a:r>
-            <a:r>
-              <a:rPr sz="1280" b="0" dirty="0">
-                <a:solidFill>
-                  <a:srgbClr val="3A3550"/>
-                </a:solidFill>
-                <a:latin typeface="Meiryo"/>
-                <a:ea typeface="Meiryo"/>
-                <a:cs typeface="Meiryo"/>
-              </a:rPr>
-              <a:t>ー（</a:t>
-            </a:r>
-            <a:r>
-              <a:rPr sz="1280" b="0" dirty="0" err="1">
-                <a:solidFill>
-                  <a:srgbClr val="3A3550"/>
-                </a:solidFill>
-                <a:latin typeface="Meiryo"/>
-                <a:ea typeface="Meiryo"/>
-                <a:cs typeface="Meiryo"/>
-              </a:rPr>
-              <a:t>重複・NULL禁止</a:t>
-            </a:r>
-            <a:r>
-              <a:rPr sz="1280" b="0" dirty="0">
-                <a:solidFill>
-                  <a:srgbClr val="3A3550"/>
-                </a:solidFill>
-                <a:latin typeface="Meiryo"/>
-                <a:ea typeface="Meiryo"/>
-                <a:cs typeface="Meiryo"/>
-              </a:rPr>
-              <a:t>）</a:t>
-            </a:r>
-            <a:endParaRPr lang="en-US" sz="1280" b="0" dirty="0">
-              <a:solidFill>
-                <a:srgbClr val="3A3550"/>
-              </a:solidFill>
-              <a:latin typeface="Meiryo"/>
-              <a:ea typeface="Meiryo"/>
-              <a:cs typeface="Meiryo"/>
-            </a:endParaRPr>
-          </a:p>
-          <a:p>
-            <a:pPr algn="l">
-              <a:lnSpc>
-                <a:spcPct val="114000"/>
-              </a:lnSpc>
-              <a:spcAft>
-                <a:spcPts val="300"/>
-              </a:spcAft>
-            </a:pPr>
-            <a:r>
-              <a:rPr sz="1280" b="0" dirty="0">
-                <a:solidFill>
-                  <a:srgbClr val="3A3550"/>
-                </a:solidFill>
-                <a:latin typeface="Meiryo"/>
-                <a:ea typeface="Meiryo"/>
-                <a:cs typeface="Meiryo"/>
-              </a:rPr>
-              <a:t>NOT </a:t>
-            </a:r>
-            <a:r>
-              <a:rPr sz="1280" b="0" dirty="0" err="1">
-                <a:solidFill>
-                  <a:srgbClr val="3A3550"/>
-                </a:solidFill>
-                <a:latin typeface="Meiryo"/>
-                <a:ea typeface="Meiryo"/>
-                <a:cs typeface="Meiryo"/>
-              </a:rPr>
-              <a:t>NULL＝必ず値を入れる（入れ忘れ防止</a:t>
-            </a:r>
-            <a:r>
-              <a:rPr sz="1280" b="0" dirty="0">
-                <a:solidFill>
-                  <a:srgbClr val="3A3550"/>
-                </a:solidFill>
-                <a:latin typeface="Meiryo"/>
-                <a:ea typeface="Meiryo"/>
-                <a:cs typeface="Meiryo"/>
-              </a:rPr>
-              <a:t>）</a:t>
+              <a:t>PRIMARY KEY＝主キー（重複・NULL禁止）NOT NULL＝必ず値を入れる（入れ忘れ防止）</a:t>
             </a:r>
           </a:p>
         </p:txBody>

--- a/SQL 1年生 PowerPoint.pptx
+++ b/SQL 1年生 PowerPoint.pptx
@@ -1090,7 +1090,7 @@
             </a:r>
             <a:r>
               <a:rPr lang="ja-JP" altLang="en-US" dirty="0"/>
-              <a:t>購入した数</a:t>
+              <a:t>商品の個数</a:t>
             </a:r>
             <a:r>
               <a:rPr dirty="0" err="1"/>
